--- a/期末報告.pptx
+++ b/期末報告.pptx
@@ -14,11 +14,11 @@
     <p:sldId id="262" r:id="rId5"/>
     <p:sldId id="271" r:id="rId6"/>
     <p:sldId id="273" r:id="rId7"/>
-    <p:sldId id="264" r:id="rId8"/>
+    <p:sldId id="260" r:id="rId8"/>
     <p:sldId id="267" r:id="rId9"/>
-    <p:sldId id="265" r:id="rId10"/>
-    <p:sldId id="266" r:id="rId11"/>
-    <p:sldId id="260" r:id="rId12"/>
+    <p:sldId id="264" r:id="rId10"/>
+    <p:sldId id="265" r:id="rId11"/>
+    <p:sldId id="266" r:id="rId12"/>
     <p:sldId id="268" r:id="rId13"/>
     <p:sldId id="263" r:id="rId14"/>
   </p:sldIdLst>
@@ -4343,7 +4343,7 @@
         <p:cNvPr id="1" name="">
           <a:extLst>
             <a:ext uri="{FF2B5EF4-FFF2-40B4-BE49-F238E27FC236}">
-              <a16:creationId xmlns:a16="http://schemas.microsoft.com/office/drawing/2014/main" id="{D85D4188-43D0-4FDE-F441-B78F0D834DD0}"/>
+              <a16:creationId xmlns:a16="http://schemas.microsoft.com/office/drawing/2014/main" id="{388956CB-FA84-C535-473B-B87DDFBD4CF2}"/>
             </a:ext>
           </a:extLst>
         </p:cNvPr>
@@ -4363,7 +4363,7 @@
           <p:cNvPr id="15" name="Rectangle 8">
             <a:extLst>
               <a:ext uri="{FF2B5EF4-FFF2-40B4-BE49-F238E27FC236}">
-                <a16:creationId xmlns:a16="http://schemas.microsoft.com/office/drawing/2014/main" id="{58BD4ED0-127F-7CDB-DF90-4E31F03190A2}"/>
+                <a16:creationId xmlns:a16="http://schemas.microsoft.com/office/drawing/2014/main" id="{83B0E43A-7D7E-DC30-6D13-EE2CE2B2C2E4}"/>
               </a:ext>
               <a:ext uri="{C183D7F6-B498-43B3-948B-1728B52AA6E4}">
                 <adec:decorative xmlns:adec="http://schemas.microsoft.com/office/drawing/2017/decorative" val="1"/>
@@ -4423,7 +4423,7 @@
           <p:cNvPr id="3" name="副標題 2">
             <a:extLst>
               <a:ext uri="{FF2B5EF4-FFF2-40B4-BE49-F238E27FC236}">
-                <a16:creationId xmlns:a16="http://schemas.microsoft.com/office/drawing/2014/main" id="{5E3C6F1C-ABF0-87AC-875D-4A21CE57FDC8}"/>
+                <a16:creationId xmlns:a16="http://schemas.microsoft.com/office/drawing/2014/main" id="{D4296C37-C379-3735-37CF-ECE5FBE96F78}"/>
               </a:ext>
             </a:extLst>
           </p:cNvPr>
@@ -4436,7 +4436,7 @@
         </p:nvSpPr>
         <p:spPr>
           <a:xfrm>
-            <a:off x="800984" y="830826"/>
+            <a:off x="800984" y="771833"/>
             <a:ext cx="2264846" cy="1376249"/>
           </a:xfrm>
         </p:spPr>
@@ -4449,7 +4449,7 @@
             <a:pPr algn="l"/>
             <a:r>
               <a:rPr lang="en-US" altLang="zh-TW" b="1" dirty="0" err="1"/>
-              <a:t>ui.h</a:t>
+              <a:t>jobs.h</a:t>
             </a:r>
             <a:r>
               <a:rPr lang="en-US" altLang="zh-TW" b="1" dirty="0"/>
@@ -4474,7 +4474,7 @@
           <p:cNvPr id="6" name="Picture 3">
             <a:extLst>
               <a:ext uri="{FF2B5EF4-FFF2-40B4-BE49-F238E27FC236}">
-                <a16:creationId xmlns:a16="http://schemas.microsoft.com/office/drawing/2014/main" id="{03EAF66E-E9F5-1B29-2222-2EB79FDD3DA8}"/>
+                <a16:creationId xmlns:a16="http://schemas.microsoft.com/office/drawing/2014/main" id="{C4D8A897-026D-C307-C93F-4486FD5D45BB}"/>
               </a:ext>
             </a:extLst>
           </p:cNvPr>
@@ -4507,7 +4507,7 @@
           <p:cNvPr id="4" name="圖片 3">
             <a:extLst>
               <a:ext uri="{FF2B5EF4-FFF2-40B4-BE49-F238E27FC236}">
-                <a16:creationId xmlns:a16="http://schemas.microsoft.com/office/drawing/2014/main" id="{F0F50355-16B8-42ED-CDFF-62F6E31AAD1A}"/>
+                <a16:creationId xmlns:a16="http://schemas.microsoft.com/office/drawing/2014/main" id="{E559DCCD-CECE-6111-2F94-1E7E4E8C021E}"/>
               </a:ext>
             </a:extLst>
           </p:cNvPr>
@@ -4524,8 +4524,8 @@
         </p:blipFill>
         <p:spPr>
           <a:xfrm>
-            <a:off x="1522185" y="1518950"/>
-            <a:ext cx="8973462" cy="3934456"/>
+            <a:off x="1051154" y="1326011"/>
+            <a:ext cx="9803659" cy="5274175"/>
           </a:xfrm>
           <a:prstGeom prst="rect">
             <a:avLst/>
@@ -4535,7 +4535,7 @@
     </p:spTree>
     <p:extLst>
       <p:ext uri="{BB962C8B-B14F-4D97-AF65-F5344CB8AC3E}">
-        <p14:creationId xmlns:p14="http://schemas.microsoft.com/office/powerpoint/2010/main" val="1143903120"/>
+        <p14:creationId xmlns:p14="http://schemas.microsoft.com/office/powerpoint/2010/main" val="3286678278"/>
       </p:ext>
     </p:extLst>
   </p:cSld>
@@ -4561,7 +4561,7 @@
         <p:cNvPr id="1" name="">
           <a:extLst>
             <a:ext uri="{FF2B5EF4-FFF2-40B4-BE49-F238E27FC236}">
-              <a16:creationId xmlns:a16="http://schemas.microsoft.com/office/drawing/2014/main" id="{6DE3202F-87C5-73C5-B2FB-93E56CA3087E}"/>
+              <a16:creationId xmlns:a16="http://schemas.microsoft.com/office/drawing/2014/main" id="{D85D4188-43D0-4FDE-F441-B78F0D834DD0}"/>
             </a:ext>
           </a:extLst>
         </p:cNvPr>
@@ -4581,7 +4581,7 @@
           <p:cNvPr id="15" name="Rectangle 8">
             <a:extLst>
               <a:ext uri="{FF2B5EF4-FFF2-40B4-BE49-F238E27FC236}">
-                <a16:creationId xmlns:a16="http://schemas.microsoft.com/office/drawing/2014/main" id="{AEFBFA95-45DB-E17B-1EC2-0347F926C1BB}"/>
+                <a16:creationId xmlns:a16="http://schemas.microsoft.com/office/drawing/2014/main" id="{58BD4ED0-127F-7CDB-DF90-4E31F03190A2}"/>
               </a:ext>
               <a:ext uri="{C183D7F6-B498-43B3-948B-1728B52AA6E4}">
                 <adec:decorative xmlns:adec="http://schemas.microsoft.com/office/drawing/2017/decorative" val="1"/>
@@ -4641,7 +4641,7 @@
           <p:cNvPr id="3" name="副標題 2">
             <a:extLst>
               <a:ext uri="{FF2B5EF4-FFF2-40B4-BE49-F238E27FC236}">
-                <a16:creationId xmlns:a16="http://schemas.microsoft.com/office/drawing/2014/main" id="{2470C397-6DE0-A00C-6055-3527FC61B380}"/>
+                <a16:creationId xmlns:a16="http://schemas.microsoft.com/office/drawing/2014/main" id="{5E3C6F1C-ABF0-87AC-875D-4A21CE57FDC8}"/>
               </a:ext>
             </a:extLst>
           </p:cNvPr>
@@ -4654,7 +4654,7 @@
         </p:nvSpPr>
         <p:spPr>
           <a:xfrm>
-            <a:off x="250378" y="762000"/>
+            <a:off x="800984" y="830826"/>
             <a:ext cx="2264846" cy="1376249"/>
           </a:xfrm>
         </p:spPr>
@@ -4666,13 +4666,17 @@
           <a:p>
             <a:pPr algn="l"/>
             <a:r>
+              <a:rPr lang="en-US" altLang="zh-TW" b="1" dirty="0" err="1"/>
+              <a:t>ui.h</a:t>
+            </a:r>
+            <a:r>
               <a:rPr lang="en-US" altLang="zh-TW" b="1" dirty="0"/>
-              <a:t>main.cpp:</a:t>
+              <a:t>:</a:t>
             </a:r>
           </a:p>
           <a:p>
             <a:pPr algn="l"/>
-            <a:endParaRPr lang="en-US" altLang="zh-TW" b="1" dirty="0"/>
+            <a:endParaRPr lang="en-US" altLang="zh-TW" dirty="0"/>
           </a:p>
           <a:p>
             <a:pPr algn="l"/>
@@ -4685,10 +4689,10 @@
       </p:sp>
       <p:pic>
         <p:nvPicPr>
-          <p:cNvPr id="8" name="Picture 3">
-            <a:extLst>
-              <a:ext uri="{FF2B5EF4-FFF2-40B4-BE49-F238E27FC236}">
-                <a16:creationId xmlns:a16="http://schemas.microsoft.com/office/drawing/2014/main" id="{B45154DC-5896-56EC-6CFC-EBF5D96A3BC5}"/>
+          <p:cNvPr id="6" name="Picture 3">
+            <a:extLst>
+              <a:ext uri="{FF2B5EF4-FFF2-40B4-BE49-F238E27FC236}">
+                <a16:creationId xmlns:a16="http://schemas.microsoft.com/office/drawing/2014/main" id="{03EAF66E-E9F5-1B29-2222-2EB79FDD3DA8}"/>
               </a:ext>
             </a:extLst>
           </p:cNvPr>
@@ -4718,10 +4722,10 @@
       </p:pic>
       <p:pic>
         <p:nvPicPr>
-          <p:cNvPr id="7" name="圖片 6">
-            <a:extLst>
-              <a:ext uri="{FF2B5EF4-FFF2-40B4-BE49-F238E27FC236}">
-                <a16:creationId xmlns:a16="http://schemas.microsoft.com/office/drawing/2014/main" id="{43246E43-F55A-69EF-CED2-CFC9EFD87146}"/>
+          <p:cNvPr id="4" name="圖片 3">
+            <a:extLst>
+              <a:ext uri="{FF2B5EF4-FFF2-40B4-BE49-F238E27FC236}">
+                <a16:creationId xmlns:a16="http://schemas.microsoft.com/office/drawing/2014/main" id="{F0F50355-16B8-42ED-CDFF-62F6E31AAD1A}"/>
               </a:ext>
             </a:extLst>
           </p:cNvPr>
@@ -4738,38 +4742,8 @@
         </p:blipFill>
         <p:spPr>
           <a:xfrm>
-            <a:off x="6096000" y="1779780"/>
-            <a:ext cx="6049628" cy="4208206"/>
-          </a:xfrm>
-          <a:prstGeom prst="rect">
-            <a:avLst/>
-          </a:prstGeom>
-        </p:spPr>
-      </p:pic>
-      <p:pic>
-        <p:nvPicPr>
-          <p:cNvPr id="4" name="圖片 3">
-            <a:extLst>
-              <a:ext uri="{FF2B5EF4-FFF2-40B4-BE49-F238E27FC236}">
-                <a16:creationId xmlns:a16="http://schemas.microsoft.com/office/drawing/2014/main" id="{81D31FAE-DCB9-FCD8-969D-6345B3D086EB}"/>
-              </a:ext>
-            </a:extLst>
-          </p:cNvPr>
-          <p:cNvPicPr>
-            <a:picLocks noChangeAspect="1"/>
-          </p:cNvPicPr>
-          <p:nvPr/>
-        </p:nvPicPr>
-        <p:blipFill>
-          <a:blip r:embed="rId4"/>
-          <a:stretch>
-            <a:fillRect/>
-          </a:stretch>
-        </p:blipFill>
-        <p:spPr>
-          <a:xfrm>
-            <a:off x="312490" y="1779780"/>
-            <a:ext cx="5753978" cy="4208205"/>
+            <a:off x="1522185" y="1518950"/>
+            <a:ext cx="8973462" cy="3934456"/>
           </a:xfrm>
           <a:prstGeom prst="rect">
             <a:avLst/>
@@ -4779,7 +4753,7 @@
     </p:spTree>
     <p:extLst>
       <p:ext uri="{BB962C8B-B14F-4D97-AF65-F5344CB8AC3E}">
-        <p14:creationId xmlns:p14="http://schemas.microsoft.com/office/powerpoint/2010/main" val="289964389"/>
+        <p14:creationId xmlns:p14="http://schemas.microsoft.com/office/powerpoint/2010/main" val="1143903120"/>
       </p:ext>
     </p:extLst>
   </p:cSld>
@@ -7355,7 +7329,7 @@
         <p:cNvPr id="1" name="">
           <a:extLst>
             <a:ext uri="{FF2B5EF4-FFF2-40B4-BE49-F238E27FC236}">
-              <a16:creationId xmlns:a16="http://schemas.microsoft.com/office/drawing/2014/main" id="{93F9217E-B194-DE92-4B84-2C632F2D34EC}"/>
+              <a16:creationId xmlns:a16="http://schemas.microsoft.com/office/drawing/2014/main" id="{6DE3202F-87C5-73C5-B2FB-93E56CA3087E}"/>
             </a:ext>
           </a:extLst>
         </p:cNvPr>
@@ -7375,7 +7349,7 @@
           <p:cNvPr id="15" name="Rectangle 8">
             <a:extLst>
               <a:ext uri="{FF2B5EF4-FFF2-40B4-BE49-F238E27FC236}">
-                <a16:creationId xmlns:a16="http://schemas.microsoft.com/office/drawing/2014/main" id="{DA6991AA-FA9D-310E-B5D6-C8FAFF4BE0C2}"/>
+                <a16:creationId xmlns:a16="http://schemas.microsoft.com/office/drawing/2014/main" id="{AEFBFA95-45DB-E17B-1EC2-0347F926C1BB}"/>
               </a:ext>
               <a:ext uri="{C183D7F6-B498-43B3-948B-1728B52AA6E4}">
                 <adec:decorative xmlns:adec="http://schemas.microsoft.com/office/drawing/2017/decorative" val="1"/>
@@ -7435,7 +7409,7 @@
           <p:cNvPr id="3" name="副標題 2">
             <a:extLst>
               <a:ext uri="{FF2B5EF4-FFF2-40B4-BE49-F238E27FC236}">
-                <a16:creationId xmlns:a16="http://schemas.microsoft.com/office/drawing/2014/main" id="{6ED3361D-757E-D7FC-84BA-1E0369140287}"/>
+                <a16:creationId xmlns:a16="http://schemas.microsoft.com/office/drawing/2014/main" id="{2470C397-6DE0-A00C-6055-3527FC61B380}"/>
               </a:ext>
             </a:extLst>
           </p:cNvPr>
@@ -7460,17 +7434,13 @@
           <a:p>
             <a:pPr algn="l"/>
             <a:r>
-              <a:rPr lang="en-US" altLang="zh-TW" b="1" dirty="0" err="1"/>
-              <a:t>character.h</a:t>
-            </a:r>
-            <a:r>
               <a:rPr lang="en-US" altLang="zh-TW" b="1" dirty="0"/>
-              <a:t>:</a:t>
+              <a:t>main.cpp:</a:t>
             </a:r>
           </a:p>
           <a:p>
             <a:pPr algn="l"/>
-            <a:endParaRPr lang="en-US" altLang="zh-TW" dirty="0"/>
+            <a:endParaRPr lang="en-US" altLang="zh-TW" b="1" dirty="0"/>
           </a:p>
           <a:p>
             <a:pPr algn="l"/>
@@ -7483,10 +7453,10 @@
       </p:sp>
       <p:pic>
         <p:nvPicPr>
-          <p:cNvPr id="6" name="Picture 3">
-            <a:extLst>
-              <a:ext uri="{FF2B5EF4-FFF2-40B4-BE49-F238E27FC236}">
-                <a16:creationId xmlns:a16="http://schemas.microsoft.com/office/drawing/2014/main" id="{B731674E-58ED-7503-3E96-8CB7D8BA4717}"/>
+          <p:cNvPr id="8" name="Picture 3">
+            <a:extLst>
+              <a:ext uri="{FF2B5EF4-FFF2-40B4-BE49-F238E27FC236}">
+                <a16:creationId xmlns:a16="http://schemas.microsoft.com/office/drawing/2014/main" id="{B45154DC-5896-56EC-6CFC-EBF5D96A3BC5}"/>
               </a:ext>
             </a:extLst>
           </p:cNvPr>
@@ -7516,10 +7486,10 @@
       </p:pic>
       <p:pic>
         <p:nvPicPr>
-          <p:cNvPr id="5" name="圖片 4">
-            <a:extLst>
-              <a:ext uri="{FF2B5EF4-FFF2-40B4-BE49-F238E27FC236}">
-                <a16:creationId xmlns:a16="http://schemas.microsoft.com/office/drawing/2014/main" id="{FE5FFDC8-2F0A-BD01-68DB-359E2BBBAAC3}"/>
+          <p:cNvPr id="7" name="圖片 6">
+            <a:extLst>
+              <a:ext uri="{FF2B5EF4-FFF2-40B4-BE49-F238E27FC236}">
+                <a16:creationId xmlns:a16="http://schemas.microsoft.com/office/drawing/2014/main" id="{43246E43-F55A-69EF-CED2-CFC9EFD87146}"/>
               </a:ext>
             </a:extLst>
           </p:cNvPr>
@@ -7536,8 +7506,38 @@
         </p:blipFill>
         <p:spPr>
           <a:xfrm>
-            <a:off x="2171982" y="484238"/>
-            <a:ext cx="7848035" cy="5889523"/>
+            <a:off x="6096000" y="1779780"/>
+            <a:ext cx="6049628" cy="4208206"/>
+          </a:xfrm>
+          <a:prstGeom prst="rect">
+            <a:avLst/>
+          </a:prstGeom>
+        </p:spPr>
+      </p:pic>
+      <p:pic>
+        <p:nvPicPr>
+          <p:cNvPr id="4" name="圖片 3">
+            <a:extLst>
+              <a:ext uri="{FF2B5EF4-FFF2-40B4-BE49-F238E27FC236}">
+                <a16:creationId xmlns:a16="http://schemas.microsoft.com/office/drawing/2014/main" id="{81D31FAE-DCB9-FCD8-969D-6345B3D086EB}"/>
+              </a:ext>
+            </a:extLst>
+          </p:cNvPr>
+          <p:cNvPicPr>
+            <a:picLocks noChangeAspect="1"/>
+          </p:cNvPicPr>
+          <p:nvPr/>
+        </p:nvPicPr>
+        <p:blipFill>
+          <a:blip r:embed="rId4"/>
+          <a:stretch>
+            <a:fillRect/>
+          </a:stretch>
+        </p:blipFill>
+        <p:spPr>
+          <a:xfrm>
+            <a:off x="312490" y="1779780"/>
+            <a:ext cx="5753978" cy="4208205"/>
           </a:xfrm>
           <a:prstGeom prst="rect">
             <a:avLst/>
@@ -7547,7 +7547,7 @@
     </p:spTree>
     <p:extLst>
       <p:ext uri="{BB962C8B-B14F-4D97-AF65-F5344CB8AC3E}">
-        <p14:creationId xmlns:p14="http://schemas.microsoft.com/office/powerpoint/2010/main" val="1062652041"/>
+        <p14:creationId xmlns:p14="http://schemas.microsoft.com/office/powerpoint/2010/main" val="289964389"/>
       </p:ext>
     </p:extLst>
   </p:cSld>
@@ -7817,7 +7817,7 @@
         <p:cNvPr id="1" name="">
           <a:extLst>
             <a:ext uri="{FF2B5EF4-FFF2-40B4-BE49-F238E27FC236}">
-              <a16:creationId xmlns:a16="http://schemas.microsoft.com/office/drawing/2014/main" id="{388956CB-FA84-C535-473B-B87DDFBD4CF2}"/>
+              <a16:creationId xmlns:a16="http://schemas.microsoft.com/office/drawing/2014/main" id="{93F9217E-B194-DE92-4B84-2C632F2D34EC}"/>
             </a:ext>
           </a:extLst>
         </p:cNvPr>
@@ -7837,7 +7837,7 @@
           <p:cNvPr id="15" name="Rectangle 8">
             <a:extLst>
               <a:ext uri="{FF2B5EF4-FFF2-40B4-BE49-F238E27FC236}">
-                <a16:creationId xmlns:a16="http://schemas.microsoft.com/office/drawing/2014/main" id="{83B0E43A-7D7E-DC30-6D13-EE2CE2B2C2E4}"/>
+                <a16:creationId xmlns:a16="http://schemas.microsoft.com/office/drawing/2014/main" id="{DA6991AA-FA9D-310E-B5D6-C8FAFF4BE0C2}"/>
               </a:ext>
               <a:ext uri="{C183D7F6-B498-43B3-948B-1728B52AA6E4}">
                 <adec:decorative xmlns:adec="http://schemas.microsoft.com/office/drawing/2017/decorative" val="1"/>
@@ -7897,7 +7897,7 @@
           <p:cNvPr id="3" name="副標題 2">
             <a:extLst>
               <a:ext uri="{FF2B5EF4-FFF2-40B4-BE49-F238E27FC236}">
-                <a16:creationId xmlns:a16="http://schemas.microsoft.com/office/drawing/2014/main" id="{D4296C37-C379-3735-37CF-ECE5FBE96F78}"/>
+                <a16:creationId xmlns:a16="http://schemas.microsoft.com/office/drawing/2014/main" id="{6ED3361D-757E-D7FC-84BA-1E0369140287}"/>
               </a:ext>
             </a:extLst>
           </p:cNvPr>
@@ -7910,7 +7910,7 @@
         </p:nvSpPr>
         <p:spPr>
           <a:xfrm>
-            <a:off x="800984" y="771833"/>
+            <a:off x="250378" y="762000"/>
             <a:ext cx="2264846" cy="1376249"/>
           </a:xfrm>
         </p:spPr>
@@ -7923,7 +7923,7 @@
             <a:pPr algn="l"/>
             <a:r>
               <a:rPr lang="en-US" altLang="zh-TW" b="1" dirty="0" err="1"/>
-              <a:t>jobs.h</a:t>
+              <a:t>character.h</a:t>
             </a:r>
             <a:r>
               <a:rPr lang="en-US" altLang="zh-TW" b="1" dirty="0"/>
@@ -7948,7 +7948,7 @@
           <p:cNvPr id="6" name="Picture 3">
             <a:extLst>
               <a:ext uri="{FF2B5EF4-FFF2-40B4-BE49-F238E27FC236}">
-                <a16:creationId xmlns:a16="http://schemas.microsoft.com/office/drawing/2014/main" id="{C4D8A897-026D-C307-C93F-4486FD5D45BB}"/>
+                <a16:creationId xmlns:a16="http://schemas.microsoft.com/office/drawing/2014/main" id="{B731674E-58ED-7503-3E96-8CB7D8BA4717}"/>
               </a:ext>
             </a:extLst>
           </p:cNvPr>
@@ -7978,10 +7978,10 @@
       </p:pic>
       <p:pic>
         <p:nvPicPr>
-          <p:cNvPr id="4" name="圖片 3">
-            <a:extLst>
-              <a:ext uri="{FF2B5EF4-FFF2-40B4-BE49-F238E27FC236}">
-                <a16:creationId xmlns:a16="http://schemas.microsoft.com/office/drawing/2014/main" id="{E559DCCD-CECE-6111-2F94-1E7E4E8C021E}"/>
+          <p:cNvPr id="5" name="圖片 4">
+            <a:extLst>
+              <a:ext uri="{FF2B5EF4-FFF2-40B4-BE49-F238E27FC236}">
+                <a16:creationId xmlns:a16="http://schemas.microsoft.com/office/drawing/2014/main" id="{FE5FFDC8-2F0A-BD01-68DB-359E2BBBAAC3}"/>
               </a:ext>
             </a:extLst>
           </p:cNvPr>
@@ -7998,8 +7998,8 @@
         </p:blipFill>
         <p:spPr>
           <a:xfrm>
-            <a:off x="1051154" y="1326011"/>
-            <a:ext cx="9803659" cy="5274175"/>
+            <a:off x="2171982" y="484238"/>
+            <a:ext cx="7848035" cy="5889523"/>
           </a:xfrm>
           <a:prstGeom prst="rect">
             <a:avLst/>
@@ -8009,7 +8009,7 @@
     </p:spTree>
     <p:extLst>
       <p:ext uri="{BB962C8B-B14F-4D97-AF65-F5344CB8AC3E}">
-        <p14:creationId xmlns:p14="http://schemas.microsoft.com/office/powerpoint/2010/main" val="3286678278"/>
+        <p14:creationId xmlns:p14="http://schemas.microsoft.com/office/powerpoint/2010/main" val="1062652041"/>
       </p:ext>
     </p:extLst>
   </p:cSld>
